--- a/public/fun/pack/pptx/wedding/결혼식_47_러브스토리중심_성탄절우체국.pptx
+++ b/public/fun/pack/pptx/wedding/결혼식_47_러브스토리중심_성탄절우체국.pptx
@@ -3286,6 +3286,14 @@
 <file path=ppt/slides/slide1.xml><?xml version="1.0" encoding="utf-8"?>
 <p:sld xmlns:a="http://schemas.openxmlformats.org/drawingml/2006/main" xmlns:p="http://schemas.openxmlformats.org/presentationml/2006/main" xmlns:r="http://schemas.openxmlformats.org/officeDocument/2006/relationships">
   <p:cSld>
+    <p:bg>
+      <p:bgPr>
+        <a:solidFill>
+          <a:srgbClr val="D5F6E0"/>
+        </a:solidFill>
+        <a:effectLst/>
+      </p:bgPr>
+    </p:bg>
     <p:spTree>
       <p:nvGrpSpPr>
         <p:cNvPr id="1" name=""/>
@@ -3293,30 +3301,116 @@
         <p:nvPr/>
       </p:nvGrpSpPr>
       <p:grpSpPr/>
-      <p:pic>
-        <p:nvPicPr>
-          <p:cNvPr id="3" name="표지 그림" descr="wedding-47.jpg"/>
-          <p:cNvPicPr>
-            <a:picLocks noChangeAspect="1"/>
-          </p:cNvPicPr>
-          <p:nvPr/>
-        </p:nvPicPr>
-        <p:blipFill>
-          <a:blip r:embed="rId2"/>
-          <a:stretch>
-            <a:fillRect/>
-          </a:stretch>
-        </p:blipFill>
-        <p:spPr>
-          <a:xfrm>
-            <a:off x="0" y="0"/>
-            <a:ext cx="12191695" cy="6858000"/>
+      <p:sp>
+        <p:nvSpPr>
+          <p:cNvPr id="3" name="사진 자리"/>
+          <p:cNvSpPr/>
+          <p:nvPr/>
+        </p:nvSpPr>
+        <p:spPr>
+          <a:xfrm>
+            <a:off x="7802684" y="0"/>
+            <a:ext cx="4389010" cy="6858000"/>
           </a:xfrm>
           <a:prstGeom prst="rect">
             <a:avLst/>
           </a:prstGeom>
-        </p:spPr>
-      </p:pic>
+          <a:solidFill>
+            <a:srgbClr val="ADEBC2"/>
+          </a:solidFill>
+          <a:ln>
+            <a:noFill/>
+          </a:ln>
+        </p:spPr>
+        <p:txBody>
+          <a:bodyPr rtlCol="0" anchor="ctr" wrap="square" lIns="54864" rIns="54864" tIns="27432" bIns="27432">
+            <a:noAutofit/>
+          </a:bodyPr>
+          <a:lstStyle/>
+          <a:p>
+            <a:pPr algn="ctr">
+              <a:lnSpc>
+                <a:spcPct val="100000"/>
+              </a:lnSpc>
+            </a:pPr>
+            <a:r>
+              <a:rPr sz="1400" b="0" i="0">
+                <a:solidFill>
+                  <a:srgbClr val="274932"/>
+                </a:solidFill>
+              </a:rPr>
+              <a:t>사진을 넣어 주세요</a:t>
+            </a:r>
+          </a:p>
+        </p:txBody>
+      </p:sp>
+      <p:sp>
+        <p:nvSpPr>
+          <p:cNvPr id="4" name="장식"/>
+          <p:cNvSpPr/>
+          <p:nvPr/>
+        </p:nvSpPr>
+        <p:spPr>
+          <a:xfrm>
+            <a:off x="8168435" y="365760"/>
+            <a:ext cx="3657508" cy="6126480"/>
+          </a:xfrm>
+          <a:prstGeom prst="rect">
+            <a:avLst/>
+          </a:prstGeom>
+          <a:noFill/>
+          <a:ln w="9525">
+            <a:solidFill>
+              <a:srgbClr val="26231F"/>
+            </a:solidFill>
+          </a:ln>
+        </p:spPr>
+        <p:txBody>
+          <a:bodyPr rtlCol="0" anchor="ctr"/>
+          <a:lstStyle/>
+          <a:p>
+            <a:pPr algn="ctr"/>
+          </a:p>
+        </p:txBody>
+      </p:sp>
+      <p:sp>
+        <p:nvSpPr>
+          <p:cNvPr id="5" name="라벨"/>
+          <p:cNvSpPr txBox="1"/>
+          <p:nvPr/>
+        </p:nvSpPr>
+        <p:spPr>
+          <a:xfrm>
+            <a:off x="822960" y="2148840"/>
+            <a:ext cx="5608179" cy="274320"/>
+          </a:xfrm>
+          <a:prstGeom prst="rect">
+            <a:avLst/>
+          </a:prstGeom>
+          <a:noFill/>
+        </p:spPr>
+        <p:txBody>
+          <a:bodyPr wrap="square" lIns="54864" rIns="54864" tIns="27432" bIns="27432" anchor="t">
+            <a:noAutofit/>
+          </a:bodyPr>
+          <a:lstStyle/>
+          <a:p>
+            <a:pPr algn="l">
+              <a:lnSpc>
+                <a:spcPct val="115000"/>
+              </a:lnSpc>
+            </a:pPr>
+            <a:r>
+              <a:rPr sz="1000" b="1" i="0" spc="250">
+                <a:solidFill>
+                  <a:srgbClr val="26231F"/>
+                </a:solidFill>
+              </a:rPr>
+              <a:t>WEDDING</a:t>
+            </a:r>
+          </a:p>
+        </p:txBody>
+      </p:sp>
       <p:sp>
         <p:nvSpPr>
           <p:cNvPr id="2" name="Title 1"/>
@@ -3329,8 +3423,8 @@
         </p:nvSpPr>
         <p:spPr>
           <a:xfrm>
-            <a:off x="853418" y="2057400"/>
-            <a:ext cx="6095847" cy="1554480"/>
+            <a:off x="822960" y="2606040"/>
+            <a:ext cx="5608179" cy="1188720"/>
           </a:xfrm>
         </p:spPr>
         <p:txBody>
@@ -3347,7 +3441,7 @@
             <a:r>
               <a:rPr sz="3600" b="1" i="0">
                 <a:solidFill>
-                  <a:srgbClr val="183A23"/>
+                  <a:srgbClr val="26231F"/>
                 </a:solidFill>
               </a:rPr>
               <a:t>저희 결혼합니다</a:t>
@@ -3357,14 +3451,14 @@
       </p:sp>
       <p:sp>
         <p:nvSpPr>
-          <p:cNvPr id="4" name="한 줄 문구"/>
+          <p:cNvPr id="6" name="한 줄 문구"/>
           <p:cNvSpPr txBox="1"/>
           <p:nvPr/>
         </p:nvSpPr>
         <p:spPr>
           <a:xfrm>
-            <a:off x="853418" y="3749039"/>
-            <a:ext cx="6095847" cy="822960"/>
+            <a:off x="822960" y="3886200"/>
+            <a:ext cx="5608179" cy="822960"/>
           </a:xfrm>
           <a:prstGeom prst="rect">
             <a:avLst/>
@@ -3383,26 +3477,26 @@
               </a:lnSpc>
             </a:pPr>
             <a:r>
-              <a:rPr sz="1700" b="0" i="1">
-                <a:solidFill>
-                  <a:srgbClr val="183A23"/>
+              <a:rPr sz="1700" b="0" i="0">
+                <a:solidFill>
+                  <a:srgbClr val="26231F"/>
                 </a:solidFill>
               </a:rPr>
-              <a:t>일 년을 같이 보내고 나서 결심했습니다</a:t>
-            </a:r>
-          </a:p>
-        </p:txBody>
-      </p:sp>
-      <p:sp>
-        <p:nvSpPr>
-          <p:cNvPr id="5" name="안내 문구"/>
+              <a:t>오래 같이 지내 보고 결심했습니다</a:t>
+            </a:r>
+          </a:p>
+        </p:txBody>
+      </p:sp>
+      <p:sp>
+        <p:nvSpPr>
+          <p:cNvPr id="7" name="안내 문구"/>
           <p:cNvSpPr txBox="1"/>
           <p:nvPr/>
         </p:nvSpPr>
         <p:spPr>
           <a:xfrm>
-            <a:off x="853418" y="4617720"/>
-            <a:ext cx="6095847" cy="914400"/>
+            <a:off x="822960" y="4754880"/>
+            <a:ext cx="5608179" cy="914400"/>
           </a:xfrm>
           <a:prstGeom prst="rect">
             <a:avLst/>
@@ -3423,7 +3517,7 @@
             <a:r>
               <a:rPr sz="1400" b="0" i="0">
                 <a:solidFill>
-                  <a:srgbClr val="666666"/>
+                  <a:srgbClr val="26231F"/>
                 </a:solidFill>
               </a:rPr>
               <a:t>신랑 이름 ♥ 신부 이름</a:t>
@@ -3438,10 +3532,10 @@
             <a:r>
               <a:rPr sz="1400" b="0" i="0">
                 <a:solidFill>
-                  <a:srgbClr val="666666"/>
+                  <a:srgbClr val="26231F"/>
                 </a:solidFill>
               </a:rPr>
-              <a:t>2027. 00. 00 · 예식장 이름</a:t>
+              <a:t>날짜 입력 · 예식장 이름</a:t>
             </a:r>
           </a:p>
         </p:txBody>
@@ -3480,14 +3574,14 @@
         </p:nvSpPr>
         <p:spPr>
           <a:xfrm>
-            <a:off x="9905695" y="-1463040"/>
-            <a:ext cx="3840480" cy="3840480"/>
-          </a:xfrm>
-          <a:prstGeom prst="ellipse">
+            <a:off x="0" y="6565392"/>
+            <a:ext cx="12191695" cy="292608"/>
+          </a:xfrm>
+          <a:prstGeom prst="rect">
             <a:avLst/>
           </a:prstGeom>
           <a:solidFill>
-            <a:srgbClr val="D2EFDC"/>
+            <a:srgbClr val="ADEBC2"/>
           </a:solidFill>
           <a:ln>
             <a:noFill/>
@@ -3509,14 +3603,16 @@
         </p:nvSpPr>
         <p:spPr>
           <a:xfrm>
-            <a:off x="11094415" y="274320"/>
-            <a:ext cx="411480" cy="411480"/>
-          </a:xfrm>
-          <a:prstGeom prst="ellipse">
-            <a:avLst/>
+            <a:off x="640080" y="566928"/>
+            <a:ext cx="64008" cy="868680"/>
+          </a:xfrm>
+          <a:prstGeom prst="roundRect">
+            <a:avLst>
+              <a:gd name="adj" fmla="val 50000"/>
+            </a:avLst>
           </a:prstGeom>
           <a:solidFill>
-            <a:srgbClr val="29653D"/>
+            <a:srgbClr val="98E1B1"/>
           </a:solidFill>
           <a:ln>
             <a:noFill/>
@@ -3532,6 +3628,73 @@
       </p:sp>
       <p:sp>
         <p:nvSpPr>
+          <p:cNvPr id="5" name="상단 라벨"/>
+          <p:cNvSpPr txBox="1"/>
+          <p:nvPr/>
+        </p:nvSpPr>
+        <p:spPr>
+          <a:xfrm>
+            <a:off x="868680" y="274320"/>
+            <a:ext cx="5486400" cy="274320"/>
+          </a:xfrm>
+          <a:prstGeom prst="rect">
+            <a:avLst/>
+          </a:prstGeom>
+          <a:noFill/>
+        </p:spPr>
+        <p:txBody>
+          <a:bodyPr wrap="square" lIns="54864" rIns="54864" tIns="27432" bIns="27432" anchor="ctr">
+            <a:noAutofit/>
+          </a:bodyPr>
+          <a:lstStyle/>
+          <a:p>
+            <a:pPr algn="l">
+              <a:lnSpc>
+                <a:spcPct val="115000"/>
+              </a:lnSpc>
+            </a:pPr>
+            <a:r>
+              <a:rPr sz="900" b="1" i="0" spc="250">
+                <a:solidFill>
+                  <a:srgbClr val="8E8780"/>
+                </a:solidFill>
+              </a:rPr>
+              <a:t>WEDDING</a:t>
+            </a:r>
+          </a:p>
+        </p:txBody>
+      </p:sp>
+      <p:sp>
+        <p:nvSpPr>
+          <p:cNvPr id="6" name="포인트"/>
+          <p:cNvSpPr/>
+          <p:nvPr/>
+        </p:nvSpPr>
+        <p:spPr>
+          <a:xfrm>
+            <a:off x="11167567" y="667512"/>
+            <a:ext cx="310896" cy="310896"/>
+          </a:xfrm>
+          <a:prstGeom prst="heart">
+            <a:avLst/>
+          </a:prstGeom>
+          <a:solidFill>
+            <a:srgbClr val="ADEBC2"/>
+          </a:solidFill>
+          <a:ln>
+            <a:noFill/>
+          </a:ln>
+        </p:spPr>
+        <p:txBody>
+          <a:bodyPr rtlCol="0" anchor="ctr"/>
+          <a:lstStyle/>
+          <a:p>
+            <a:pPr algn="ctr"/>
+          </a:p>
+        </p:txBody>
+      </p:sp>
+      <p:sp>
+        <p:nvSpPr>
           <p:cNvPr id="2" name="Title 1"/>
           <p:cNvSpPr>
             <a:spLocks noGrp="1"/>
@@ -3542,8 +3705,8 @@
         </p:nvSpPr>
         <p:spPr>
           <a:xfrm>
-            <a:off x="640080" y="457200"/>
-            <a:ext cx="9722815" cy="868680"/>
+            <a:off x="868680" y="566928"/>
+            <a:ext cx="9448495" cy="868680"/>
           </a:xfrm>
         </p:spPr>
         <p:txBody>
@@ -3560,7 +3723,7 @@
             <a:r>
               <a:rPr sz="3000" b="1" i="0">
                 <a:solidFill>
-                  <a:srgbClr val="183A23"/>
+                  <a:srgbClr val="26231F"/>
                 </a:solidFill>
               </a:rPr>
               <a:t>신랑 · 신부 소개</a:t>
@@ -3570,25 +3733,23 @@
       </p:sp>
       <p:sp>
         <p:nvSpPr>
-          <p:cNvPr id="5" name="사진 자리"/>
+          <p:cNvPr id="7" name="사진 자리"/>
           <p:cNvSpPr/>
           <p:nvPr/>
         </p:nvSpPr>
         <p:spPr>
           <a:xfrm>
-            <a:off x="1939213" y="1600200"/>
-            <a:ext cx="2400300" cy="2400300"/>
+            <a:off x="2042083" y="1783080"/>
+            <a:ext cx="2194560" cy="2194560"/>
           </a:xfrm>
           <a:prstGeom prst="ellipse">
             <a:avLst/>
           </a:prstGeom>
           <a:solidFill>
-            <a:srgbClr val="D2EFDC"/>
+            <a:srgbClr val="D5F6E0"/>
           </a:solidFill>
           <a:ln w="19050">
-            <a:solidFill>
-              <a:srgbClr val="29653D"/>
-            </a:solidFill>
+            <a:noFill/>
             <a:prstDash val="dash"/>
           </a:ln>
         </p:spPr>
@@ -3606,7 +3767,7 @@
             <a:r>
               <a:rPr sz="1200" b="0" i="0">
                 <a:solidFill>
-                  <a:srgbClr val="183A23"/>
+                  <a:srgbClr val="8E8780"/>
                 </a:solidFill>
               </a:rPr>
               <a:t>사진</a:t>
@@ -3616,13 +3777,13 @@
       </p:sp>
       <p:sp>
         <p:nvSpPr>
-          <p:cNvPr id="6" name="TextBox 5"/>
+          <p:cNvPr id="8" name="TextBox 7"/>
           <p:cNvSpPr txBox="1"/>
           <p:nvPr/>
         </p:nvSpPr>
         <p:spPr>
           <a:xfrm>
-            <a:off x="640080" y="4091939"/>
+            <a:off x="640080" y="4069079"/>
             <a:ext cx="4998567" cy="411480"/>
           </a:xfrm>
           <a:prstGeom prst="rect">
@@ -3644,7 +3805,7 @@
             <a:r>
               <a:rPr sz="1600" b="1" i="0">
                 <a:solidFill>
-                  <a:srgbClr val="183A23"/>
+                  <a:srgbClr val="274932"/>
                 </a:solidFill>
               </a:rPr>
               <a:t>신랑</a:t>
@@ -3654,14 +3815,14 @@
       </p:sp>
       <p:sp>
         <p:nvSpPr>
-          <p:cNvPr id="7" name="TextBox 6"/>
+          <p:cNvPr id="9" name="TextBox 8"/>
           <p:cNvSpPr txBox="1"/>
           <p:nvPr/>
         </p:nvSpPr>
         <p:spPr>
           <a:xfrm>
-            <a:off x="731519" y="4549140"/>
-            <a:ext cx="4815687" cy="1851660"/>
+            <a:off x="731519" y="4526279"/>
+            <a:ext cx="4815687" cy="1645919"/>
           </a:xfrm>
           <a:prstGeom prst="rect">
             <a:avLst/>
@@ -3722,25 +3883,23 @@
       </p:sp>
       <p:sp>
         <p:nvSpPr>
-          <p:cNvPr id="8" name="사진 자리"/>
+          <p:cNvPr id="10" name="사진 자리"/>
           <p:cNvSpPr/>
           <p:nvPr/>
         </p:nvSpPr>
         <p:spPr>
           <a:xfrm>
-            <a:off x="7852181" y="1600200"/>
-            <a:ext cx="2400300" cy="2400300"/>
+            <a:off x="7955051" y="1783080"/>
+            <a:ext cx="2194560" cy="2194560"/>
           </a:xfrm>
           <a:prstGeom prst="ellipse">
             <a:avLst/>
           </a:prstGeom>
           <a:solidFill>
-            <a:srgbClr val="D2EFDC"/>
+            <a:srgbClr val="D5F6E0"/>
           </a:solidFill>
           <a:ln w="19050">
-            <a:solidFill>
-              <a:srgbClr val="29653D"/>
-            </a:solidFill>
+            <a:noFill/>
             <a:prstDash val="dash"/>
           </a:ln>
         </p:spPr>
@@ -3758,7 +3917,7 @@
             <a:r>
               <a:rPr sz="1200" b="0" i="0">
                 <a:solidFill>
-                  <a:srgbClr val="183A23"/>
+                  <a:srgbClr val="8E8780"/>
                 </a:solidFill>
               </a:rPr>
               <a:t>사진</a:t>
@@ -3768,13 +3927,13 @@
       </p:sp>
       <p:sp>
         <p:nvSpPr>
-          <p:cNvPr id="9" name="TextBox 8"/>
+          <p:cNvPr id="11" name="TextBox 10"/>
           <p:cNvSpPr txBox="1"/>
           <p:nvPr/>
         </p:nvSpPr>
         <p:spPr>
           <a:xfrm>
-            <a:off x="6553047" y="4091939"/>
+            <a:off x="6553047" y="4069079"/>
             <a:ext cx="4998567" cy="411480"/>
           </a:xfrm>
           <a:prstGeom prst="rect">
@@ -3796,7 +3955,7 @@
             <a:r>
               <a:rPr sz="1600" b="1" i="0">
                 <a:solidFill>
-                  <a:srgbClr val="183A23"/>
+                  <a:srgbClr val="274932"/>
                 </a:solidFill>
               </a:rPr>
               <a:t>신부</a:t>
@@ -3806,14 +3965,14 @@
       </p:sp>
       <p:sp>
         <p:nvSpPr>
-          <p:cNvPr id="10" name="TextBox 9"/>
+          <p:cNvPr id="12" name="TextBox 11"/>
           <p:cNvSpPr txBox="1"/>
           <p:nvPr/>
         </p:nvSpPr>
         <p:spPr>
           <a:xfrm>
-            <a:off x="6644487" y="4549140"/>
-            <a:ext cx="4815687" cy="1851660"/>
+            <a:off x="6644487" y="4526279"/>
+            <a:ext cx="4815687" cy="1645919"/>
           </a:xfrm>
           <a:prstGeom prst="rect">
             <a:avLst/>
@@ -3906,14 +4065,14 @@
         </p:nvSpPr>
         <p:spPr>
           <a:xfrm>
-            <a:off x="9905695" y="-1463040"/>
-            <a:ext cx="3840480" cy="3840480"/>
-          </a:xfrm>
-          <a:prstGeom prst="ellipse">
+            <a:off x="0" y="6565392"/>
+            <a:ext cx="12191695" cy="292608"/>
+          </a:xfrm>
+          <a:prstGeom prst="rect">
             <a:avLst/>
           </a:prstGeom>
           <a:solidFill>
-            <a:srgbClr val="D2EFDC"/>
+            <a:srgbClr val="ADEBC2"/>
           </a:solidFill>
           <a:ln>
             <a:noFill/>
@@ -3935,14 +4094,16 @@
         </p:nvSpPr>
         <p:spPr>
           <a:xfrm>
-            <a:off x="11094415" y="274320"/>
-            <a:ext cx="411480" cy="411480"/>
-          </a:xfrm>
-          <a:prstGeom prst="ellipse">
-            <a:avLst/>
+            <a:off x="640080" y="566928"/>
+            <a:ext cx="64008" cy="868680"/>
+          </a:xfrm>
+          <a:prstGeom prst="roundRect">
+            <a:avLst>
+              <a:gd name="adj" fmla="val 50000"/>
+            </a:avLst>
           </a:prstGeom>
           <a:solidFill>
-            <a:srgbClr val="29653D"/>
+            <a:srgbClr val="98E1B1"/>
           </a:solidFill>
           <a:ln>
             <a:noFill/>
@@ -3958,6 +4119,73 @@
       </p:sp>
       <p:sp>
         <p:nvSpPr>
+          <p:cNvPr id="5" name="상단 라벨"/>
+          <p:cNvSpPr txBox="1"/>
+          <p:nvPr/>
+        </p:nvSpPr>
+        <p:spPr>
+          <a:xfrm>
+            <a:off x="868680" y="274320"/>
+            <a:ext cx="5486400" cy="274320"/>
+          </a:xfrm>
+          <a:prstGeom prst="rect">
+            <a:avLst/>
+          </a:prstGeom>
+          <a:noFill/>
+        </p:spPr>
+        <p:txBody>
+          <a:bodyPr wrap="square" lIns="54864" rIns="54864" tIns="27432" bIns="27432" anchor="ctr">
+            <a:noAutofit/>
+          </a:bodyPr>
+          <a:lstStyle/>
+          <a:p>
+            <a:pPr algn="l">
+              <a:lnSpc>
+                <a:spcPct val="115000"/>
+              </a:lnSpc>
+            </a:pPr>
+            <a:r>
+              <a:rPr sz="900" b="1" i="0" spc="250">
+                <a:solidFill>
+                  <a:srgbClr val="8E8780"/>
+                </a:solidFill>
+              </a:rPr>
+              <a:t>WEDDING</a:t>
+            </a:r>
+          </a:p>
+        </p:txBody>
+      </p:sp>
+      <p:sp>
+        <p:nvSpPr>
+          <p:cNvPr id="6" name="포인트"/>
+          <p:cNvSpPr/>
+          <p:nvPr/>
+        </p:nvSpPr>
+        <p:spPr>
+          <a:xfrm>
+            <a:off x="11167567" y="667512"/>
+            <a:ext cx="310896" cy="310896"/>
+          </a:xfrm>
+          <a:prstGeom prst="heart">
+            <a:avLst/>
+          </a:prstGeom>
+          <a:solidFill>
+            <a:srgbClr val="ADEBC2"/>
+          </a:solidFill>
+          <a:ln>
+            <a:noFill/>
+          </a:ln>
+        </p:spPr>
+        <p:txBody>
+          <a:bodyPr rtlCol="0" anchor="ctr"/>
+          <a:lstStyle/>
+          <a:p>
+            <a:pPr algn="ctr"/>
+          </a:p>
+        </p:txBody>
+      </p:sp>
+      <p:sp>
+        <p:nvSpPr>
           <p:cNvPr id="2" name="Title 1"/>
           <p:cNvSpPr>
             <a:spLocks noGrp="1"/>
@@ -3968,8 +4196,8 @@
         </p:nvSpPr>
         <p:spPr>
           <a:xfrm>
-            <a:off x="640080" y="457200"/>
-            <a:ext cx="9722815" cy="868680"/>
+            <a:off x="868680" y="566928"/>
+            <a:ext cx="9448495" cy="868680"/>
           </a:xfrm>
         </p:spPr>
         <p:txBody>
@@ -3986,7 +4214,7 @@
             <a:r>
               <a:rPr sz="3000" b="1" i="0">
                 <a:solidFill>
-                  <a:srgbClr val="183A23"/>
+                  <a:srgbClr val="26231F"/>
                 </a:solidFill>
               </a:rPr>
               <a:t>우리의 이야기</a:t>
@@ -3996,20 +4224,20 @@
       </p:sp>
       <p:sp>
         <p:nvSpPr>
-          <p:cNvPr id="5" name="타임라인 선"/>
+          <p:cNvPr id="7" name="타임라인 선"/>
           <p:cNvSpPr/>
           <p:nvPr/>
         </p:nvSpPr>
         <p:spPr>
           <a:xfrm>
-            <a:off x="640080" y="3337560"/>
+            <a:off x="640080" y="3520440"/>
             <a:ext cx="10911535" cy="54864"/>
           </a:xfrm>
           <a:prstGeom prst="rect">
             <a:avLst/>
           </a:prstGeom>
           <a:solidFill>
-            <a:srgbClr val="D2EFDC"/>
+            <a:srgbClr val="D5F6E0"/>
           </a:solidFill>
           <a:ln>
             <a:noFill/>
@@ -4025,20 +4253,20 @@
       </p:sp>
       <p:sp>
         <p:nvSpPr>
-          <p:cNvPr id="6" name="때 1"/>
+          <p:cNvPr id="8" name="때 1"/>
           <p:cNvSpPr/>
           <p:nvPr/>
         </p:nvSpPr>
         <p:spPr>
           <a:xfrm>
-            <a:off x="1802853" y="3154680"/>
+            <a:off x="1802853" y="3337560"/>
             <a:ext cx="402336" cy="402336"/>
           </a:xfrm>
           <a:prstGeom prst="ellipse">
             <a:avLst/>
           </a:prstGeom>
           <a:solidFill>
-            <a:srgbClr val="29653D"/>
+            <a:srgbClr val="98E1B1"/>
           </a:solidFill>
           <a:ln w="38100">
             <a:solidFill>
@@ -4056,13 +4284,13 @@
       </p:sp>
       <p:sp>
         <p:nvSpPr>
-          <p:cNvPr id="7" name="TextBox 6"/>
+          <p:cNvPr id="9" name="TextBox 8"/>
           <p:cNvSpPr txBox="1"/>
           <p:nvPr/>
         </p:nvSpPr>
         <p:spPr>
           <a:xfrm>
-            <a:off x="685800" y="2514600"/>
+            <a:off x="685800" y="2697480"/>
             <a:ext cx="2636443" cy="457200"/>
           </a:xfrm>
           <a:prstGeom prst="rect">
@@ -4084,7 +4312,7 @@
             <a:r>
               <a:rPr sz="1600" b="1" i="0">
                 <a:solidFill>
-                  <a:srgbClr val="29653D"/>
+                  <a:srgbClr val="98E1B1"/>
                 </a:solidFill>
               </a:rPr>
               <a:t>처음 만난 날</a:t>
@@ -4094,13 +4322,13 @@
       </p:sp>
       <p:sp>
         <p:nvSpPr>
-          <p:cNvPr id="8" name="TextBox 7"/>
+          <p:cNvPr id="10" name="TextBox 9"/>
           <p:cNvSpPr txBox="1"/>
           <p:nvPr/>
         </p:nvSpPr>
         <p:spPr>
           <a:xfrm>
-            <a:off x="731519" y="3703320"/>
+            <a:off x="731519" y="3886200"/>
             <a:ext cx="2545003" cy="457200"/>
           </a:xfrm>
           <a:prstGeom prst="rect">
@@ -4122,7 +4350,7 @@
             <a:r>
               <a:rPr sz="1800" b="1" i="0">
                 <a:solidFill>
-                  <a:srgbClr val="183A23"/>
+                  <a:srgbClr val="274932"/>
                 </a:solidFill>
               </a:rPr>
               <a:t>첫 만남</a:t>
@@ -4132,13 +4360,13 @@
       </p:sp>
       <p:sp>
         <p:nvSpPr>
-          <p:cNvPr id="9" name="TextBox 8"/>
+          <p:cNvPr id="11" name="TextBox 10"/>
           <p:cNvSpPr txBox="1"/>
           <p:nvPr/>
         </p:nvSpPr>
         <p:spPr>
           <a:xfrm>
-            <a:off x="731519" y="4206240"/>
+            <a:off x="731519" y="4389120"/>
             <a:ext cx="2545003" cy="1645920"/>
           </a:xfrm>
           <a:prstGeom prst="rect">
@@ -4160,7 +4388,7 @@
             <a:r>
               <a:rPr sz="1500" b="0" i="0">
                 <a:solidFill>
-                  <a:srgbClr val="2B2B2B"/>
+                  <a:srgbClr val="26231F"/>
                 </a:solidFill>
               </a:rPr>
               <a:t>어디에서 어떻게?</a:t>
@@ -4170,20 +4398,20 @@
       </p:sp>
       <p:sp>
         <p:nvSpPr>
-          <p:cNvPr id="10" name="때 2"/>
+          <p:cNvPr id="12" name="때 2"/>
           <p:cNvSpPr/>
           <p:nvPr/>
         </p:nvSpPr>
         <p:spPr>
           <a:xfrm>
-            <a:off x="4530737" y="3154680"/>
+            <a:off x="4530737" y="3337560"/>
             <a:ext cx="402336" cy="402336"/>
           </a:xfrm>
           <a:prstGeom prst="ellipse">
             <a:avLst/>
           </a:prstGeom>
           <a:solidFill>
-            <a:srgbClr val="29653D"/>
+            <a:srgbClr val="98E1B1"/>
           </a:solidFill>
           <a:ln w="38100">
             <a:solidFill>
@@ -4201,13 +4429,13 @@
       </p:sp>
       <p:sp>
         <p:nvSpPr>
-          <p:cNvPr id="11" name="TextBox 10"/>
+          <p:cNvPr id="13" name="TextBox 12"/>
           <p:cNvSpPr txBox="1"/>
           <p:nvPr/>
         </p:nvSpPr>
         <p:spPr>
           <a:xfrm>
-            <a:off x="3413683" y="2514600"/>
+            <a:off x="3413683" y="2697480"/>
             <a:ext cx="2636443" cy="457200"/>
           </a:xfrm>
           <a:prstGeom prst="rect">
@@ -4229,7 +4457,7 @@
             <a:r>
               <a:rPr sz="1600" b="1" i="0">
                 <a:solidFill>
-                  <a:srgbClr val="29653D"/>
+                  <a:srgbClr val="98E1B1"/>
                 </a:solidFill>
               </a:rPr>
               <a:t>첫 데이트</a:t>
@@ -4239,13 +4467,13 @@
       </p:sp>
       <p:sp>
         <p:nvSpPr>
-          <p:cNvPr id="12" name="TextBox 11"/>
+          <p:cNvPr id="14" name="TextBox 13"/>
           <p:cNvSpPr txBox="1"/>
           <p:nvPr/>
         </p:nvSpPr>
         <p:spPr>
           <a:xfrm>
-            <a:off x="3459403" y="3703320"/>
+            <a:off x="3459403" y="3886200"/>
             <a:ext cx="2545003" cy="457200"/>
           </a:xfrm>
           <a:prstGeom prst="rect">
@@ -4267,7 +4495,7 @@
             <a:r>
               <a:rPr sz="1800" b="1" i="0">
                 <a:solidFill>
-                  <a:srgbClr val="183A23"/>
+                  <a:srgbClr val="274932"/>
                 </a:solidFill>
               </a:rPr>
               <a:t>설레던 하루</a:t>
@@ -4277,13 +4505,13 @@
       </p:sp>
       <p:sp>
         <p:nvSpPr>
-          <p:cNvPr id="13" name="TextBox 12"/>
+          <p:cNvPr id="15" name="TextBox 14"/>
           <p:cNvSpPr txBox="1"/>
           <p:nvPr/>
         </p:nvSpPr>
         <p:spPr>
           <a:xfrm>
-            <a:off x="3459403" y="4206240"/>
+            <a:off x="3459403" y="4389120"/>
             <a:ext cx="2545003" cy="1645920"/>
           </a:xfrm>
           <a:prstGeom prst="rect">
@@ -4305,7 +4533,7 @@
             <a:r>
               <a:rPr sz="1500" b="0" i="0">
                 <a:solidFill>
-                  <a:srgbClr val="2B2B2B"/>
+                  <a:srgbClr val="26231F"/>
                 </a:solidFill>
               </a:rPr>
               <a:t>무엇을 했나요?</a:t>
@@ -4315,20 +4543,20 @@
       </p:sp>
       <p:sp>
         <p:nvSpPr>
-          <p:cNvPr id="14" name="때 3"/>
+          <p:cNvPr id="16" name="때 3"/>
           <p:cNvSpPr/>
           <p:nvPr/>
         </p:nvSpPr>
         <p:spPr>
           <a:xfrm>
-            <a:off x="7258621" y="3154680"/>
+            <a:off x="7258621" y="3337560"/>
             <a:ext cx="402336" cy="402336"/>
           </a:xfrm>
           <a:prstGeom prst="ellipse">
             <a:avLst/>
           </a:prstGeom>
           <a:solidFill>
-            <a:srgbClr val="29653D"/>
+            <a:srgbClr val="98E1B1"/>
           </a:solidFill>
           <a:ln w="38100">
             <a:solidFill>
@@ -4346,13 +4574,13 @@
       </p:sp>
       <p:sp>
         <p:nvSpPr>
-          <p:cNvPr id="15" name="TextBox 14"/>
+          <p:cNvPr id="17" name="TextBox 16"/>
           <p:cNvSpPr txBox="1"/>
           <p:nvPr/>
         </p:nvSpPr>
         <p:spPr>
           <a:xfrm>
-            <a:off x="6141567" y="2514600"/>
+            <a:off x="6141567" y="2697480"/>
             <a:ext cx="2636443" cy="457200"/>
           </a:xfrm>
           <a:prstGeom prst="rect">
@@ -4374,7 +4602,7 @@
             <a:r>
               <a:rPr sz="1600" b="1" i="0">
                 <a:solidFill>
-                  <a:srgbClr val="29653D"/>
+                  <a:srgbClr val="98E1B1"/>
                 </a:solidFill>
               </a:rPr>
               <a:t>프러포즈</a:t>
@@ -4384,13 +4612,13 @@
       </p:sp>
       <p:sp>
         <p:nvSpPr>
-          <p:cNvPr id="16" name="TextBox 15"/>
+          <p:cNvPr id="18" name="TextBox 17"/>
           <p:cNvSpPr txBox="1"/>
           <p:nvPr/>
         </p:nvSpPr>
         <p:spPr>
           <a:xfrm>
-            <a:off x="6187287" y="3703320"/>
+            <a:off x="6187287" y="3886200"/>
             <a:ext cx="2545003" cy="457200"/>
           </a:xfrm>
           <a:prstGeom prst="rect">
@@ -4412,7 +4640,7 @@
             <a:r>
               <a:rPr sz="1800" b="1" i="0">
                 <a:solidFill>
-                  <a:srgbClr val="183A23"/>
+                  <a:srgbClr val="274932"/>
                 </a:solidFill>
               </a:rPr>
               <a:t>평생을 약속하다</a:t>
@@ -4422,13 +4650,13 @@
       </p:sp>
       <p:sp>
         <p:nvSpPr>
-          <p:cNvPr id="17" name="TextBox 16"/>
+          <p:cNvPr id="19" name="TextBox 18"/>
           <p:cNvSpPr txBox="1"/>
           <p:nvPr/>
         </p:nvSpPr>
         <p:spPr>
           <a:xfrm>
-            <a:off x="6187287" y="4206240"/>
+            <a:off x="6187287" y="4389120"/>
             <a:ext cx="2545003" cy="1645920"/>
           </a:xfrm>
           <a:prstGeom prst="rect">
@@ -4450,7 +4678,7 @@
             <a:r>
               <a:rPr sz="1500" b="0" i="0">
                 <a:solidFill>
-                  <a:srgbClr val="2B2B2B"/>
+                  <a:srgbClr val="26231F"/>
                 </a:solidFill>
               </a:rPr>
               <a:t>그날의 이야기</a:t>
@@ -4460,20 +4688,20 @@
       </p:sp>
       <p:sp>
         <p:nvSpPr>
-          <p:cNvPr id="18" name="때 4"/>
+          <p:cNvPr id="20" name="때 4"/>
           <p:cNvSpPr/>
           <p:nvPr/>
         </p:nvSpPr>
         <p:spPr>
           <a:xfrm>
-            <a:off x="9986505" y="3154680"/>
+            <a:off x="9986505" y="3337560"/>
             <a:ext cx="402336" cy="402336"/>
           </a:xfrm>
           <a:prstGeom prst="ellipse">
             <a:avLst/>
           </a:prstGeom>
           <a:solidFill>
-            <a:srgbClr val="29653D"/>
+            <a:srgbClr val="98E1B1"/>
           </a:solidFill>
           <a:ln w="38100">
             <a:solidFill>
@@ -4491,13 +4719,13 @@
       </p:sp>
       <p:sp>
         <p:nvSpPr>
-          <p:cNvPr id="19" name="TextBox 18"/>
+          <p:cNvPr id="21" name="TextBox 20"/>
           <p:cNvSpPr txBox="1"/>
           <p:nvPr/>
         </p:nvSpPr>
         <p:spPr>
           <a:xfrm>
-            <a:off x="8869451" y="2514600"/>
+            <a:off x="8869451" y="2697480"/>
             <a:ext cx="2636443" cy="457200"/>
           </a:xfrm>
           <a:prstGeom prst="rect">
@@ -4519,7 +4747,7 @@
             <a:r>
               <a:rPr sz="1600" b="1" i="0">
                 <a:solidFill>
-                  <a:srgbClr val="29653D"/>
+                  <a:srgbClr val="98E1B1"/>
                 </a:solidFill>
               </a:rPr>
               <a:t>결혼</a:t>
@@ -4529,13 +4757,13 @@
       </p:sp>
       <p:sp>
         <p:nvSpPr>
-          <p:cNvPr id="20" name="TextBox 19"/>
+          <p:cNvPr id="22" name="TextBox 21"/>
           <p:cNvSpPr txBox="1"/>
           <p:nvPr/>
         </p:nvSpPr>
         <p:spPr>
           <a:xfrm>
-            <a:off x="8915171" y="3703320"/>
+            <a:off x="8915171" y="3886200"/>
             <a:ext cx="2545003" cy="457200"/>
           </a:xfrm>
           <a:prstGeom prst="rect">
@@ -4557,7 +4785,7 @@
             <a:r>
               <a:rPr sz="1800" b="1" i="0">
                 <a:solidFill>
-                  <a:srgbClr val="183A23"/>
+                  <a:srgbClr val="274932"/>
                 </a:solidFill>
               </a:rPr>
               <a:t>오늘의 우리</a:t>
@@ -4567,13 +4795,13 @@
       </p:sp>
       <p:sp>
         <p:nvSpPr>
-          <p:cNvPr id="21" name="TextBox 20"/>
+          <p:cNvPr id="23" name="TextBox 22"/>
           <p:cNvSpPr txBox="1"/>
           <p:nvPr/>
         </p:nvSpPr>
         <p:spPr>
           <a:xfrm>
-            <a:off x="8915171" y="4206240"/>
+            <a:off x="8915171" y="4389120"/>
             <a:ext cx="2545003" cy="1645920"/>
           </a:xfrm>
           <a:prstGeom prst="rect">
@@ -4595,7 +4823,7 @@
             <a:r>
               <a:rPr sz="1500" b="0" i="0">
                 <a:solidFill>
-                  <a:srgbClr val="2B2B2B"/>
+                  <a:srgbClr val="26231F"/>
                 </a:solidFill>
               </a:rPr>
               <a:t>함께 시작합니다</a:t>
@@ -4637,14 +4865,14 @@
         </p:nvSpPr>
         <p:spPr>
           <a:xfrm>
-            <a:off x="9905695" y="-1463040"/>
-            <a:ext cx="3840480" cy="3840480"/>
-          </a:xfrm>
-          <a:prstGeom prst="ellipse">
+            <a:off x="0" y="6565392"/>
+            <a:ext cx="12191695" cy="292608"/>
+          </a:xfrm>
+          <a:prstGeom prst="rect">
             <a:avLst/>
           </a:prstGeom>
           <a:solidFill>
-            <a:srgbClr val="D2EFDC"/>
+            <a:srgbClr val="ADEBC2"/>
           </a:solidFill>
           <a:ln>
             <a:noFill/>
@@ -4666,14 +4894,16 @@
         </p:nvSpPr>
         <p:spPr>
           <a:xfrm>
-            <a:off x="11094415" y="274320"/>
-            <a:ext cx="411480" cy="411480"/>
-          </a:xfrm>
-          <a:prstGeom prst="ellipse">
-            <a:avLst/>
+            <a:off x="640080" y="566928"/>
+            <a:ext cx="64008" cy="868680"/>
+          </a:xfrm>
+          <a:prstGeom prst="roundRect">
+            <a:avLst>
+              <a:gd name="adj" fmla="val 50000"/>
+            </a:avLst>
           </a:prstGeom>
           <a:solidFill>
-            <a:srgbClr val="29653D"/>
+            <a:srgbClr val="98E1B1"/>
           </a:solidFill>
           <a:ln>
             <a:noFill/>
@@ -4689,6 +4919,73 @@
       </p:sp>
       <p:sp>
         <p:nvSpPr>
+          <p:cNvPr id="5" name="상단 라벨"/>
+          <p:cNvSpPr txBox="1"/>
+          <p:nvPr/>
+        </p:nvSpPr>
+        <p:spPr>
+          <a:xfrm>
+            <a:off x="868680" y="274320"/>
+            <a:ext cx="5486400" cy="274320"/>
+          </a:xfrm>
+          <a:prstGeom prst="rect">
+            <a:avLst/>
+          </a:prstGeom>
+          <a:noFill/>
+        </p:spPr>
+        <p:txBody>
+          <a:bodyPr wrap="square" lIns="54864" rIns="54864" tIns="27432" bIns="27432" anchor="ctr">
+            <a:noAutofit/>
+          </a:bodyPr>
+          <a:lstStyle/>
+          <a:p>
+            <a:pPr algn="l">
+              <a:lnSpc>
+                <a:spcPct val="115000"/>
+              </a:lnSpc>
+            </a:pPr>
+            <a:r>
+              <a:rPr sz="900" b="1" i="0" spc="250">
+                <a:solidFill>
+                  <a:srgbClr val="8E8780"/>
+                </a:solidFill>
+              </a:rPr>
+              <a:t>WEDDING</a:t>
+            </a:r>
+          </a:p>
+        </p:txBody>
+      </p:sp>
+      <p:sp>
+        <p:nvSpPr>
+          <p:cNvPr id="6" name="포인트"/>
+          <p:cNvSpPr/>
+          <p:nvPr/>
+        </p:nvSpPr>
+        <p:spPr>
+          <a:xfrm>
+            <a:off x="11167567" y="667512"/>
+            <a:ext cx="310896" cy="310896"/>
+          </a:xfrm>
+          <a:prstGeom prst="heart">
+            <a:avLst/>
+          </a:prstGeom>
+          <a:solidFill>
+            <a:srgbClr val="ADEBC2"/>
+          </a:solidFill>
+          <a:ln>
+            <a:noFill/>
+          </a:ln>
+        </p:spPr>
+        <p:txBody>
+          <a:bodyPr rtlCol="0" anchor="ctr"/>
+          <a:lstStyle/>
+          <a:p>
+            <a:pPr algn="ctr"/>
+          </a:p>
+        </p:txBody>
+      </p:sp>
+      <p:sp>
+        <p:nvSpPr>
           <p:cNvPr id="2" name="Title 1"/>
           <p:cNvSpPr>
             <a:spLocks noGrp="1"/>
@@ -4699,8 +4996,8 @@
         </p:nvSpPr>
         <p:spPr>
           <a:xfrm>
-            <a:off x="640080" y="457200"/>
-            <a:ext cx="9722815" cy="868680"/>
+            <a:off x="868680" y="566928"/>
+            <a:ext cx="9448495" cy="868680"/>
           </a:xfrm>
         </p:spPr>
         <p:txBody>
@@ -4717,7 +5014,7 @@
             <a:r>
               <a:rPr sz="3000" b="1" i="0">
                 <a:solidFill>
-                  <a:srgbClr val="183A23"/>
+                  <a:srgbClr val="26231F"/>
                 </a:solidFill>
               </a:rPr>
               <a:t>우리의 첫 번째</a:t>
@@ -4727,56 +5024,54 @@
       </p:sp>
       <p:sp>
         <p:nvSpPr>
-          <p:cNvPr id="5" name="카드 1"/>
+          <p:cNvPr id="7" name="카드 1"/>
           <p:cNvSpPr/>
           <p:nvPr/>
         </p:nvSpPr>
         <p:spPr>
           <a:xfrm>
-            <a:off x="640080" y="1600200"/>
-            <a:ext cx="2556433" cy="4800600"/>
+            <a:off x="640080" y="1783080"/>
+            <a:ext cx="2556433" cy="4389120"/>
           </a:xfrm>
           <a:prstGeom prst="roundRect">
             <a:avLst>
-              <a:gd name="adj" fmla="val 8000"/>
+              <a:gd name="adj" fmla="val 7000"/>
             </a:avLst>
           </a:prstGeom>
           <a:solidFill>
-            <a:srgbClr val="F1F9F3"/>
-          </a:solidFill>
-          <a:ln w="15875">
-            <a:solidFill>
-              <a:srgbClr val="D2EFDC"/>
-            </a:solidFill>
-          </a:ln>
-        </p:spPr>
-        <p:txBody>
-          <a:bodyPr rtlCol="0" anchor="ctr"/>
-          <a:lstStyle/>
-          <a:p>
-            <a:pPr algn="ctr"/>
-          </a:p>
-        </p:txBody>
-      </p:sp>
-      <p:sp>
-        <p:nvSpPr>
-          <p:cNvPr id="6" name="번호 1"/>
-          <p:cNvSpPr/>
-          <p:nvPr/>
-        </p:nvSpPr>
-        <p:spPr>
-          <a:xfrm>
-            <a:off x="822959" y="1783080"/>
-            <a:ext cx="457200" cy="457200"/>
-          </a:xfrm>
-          <a:prstGeom prst="ellipse">
-            <a:avLst/>
-          </a:prstGeom>
-          <a:solidFill>
-            <a:srgbClr val="29653D"/>
+            <a:srgbClr val="ECFBF1"/>
           </a:solidFill>
           <a:ln>
             <a:noFill/>
+          </a:ln>
+        </p:spPr>
+        <p:txBody>
+          <a:bodyPr rtlCol="0" anchor="ctr"/>
+          <a:lstStyle/>
+          <a:p>
+            <a:pPr algn="ctr"/>
+          </a:p>
+        </p:txBody>
+      </p:sp>
+      <p:sp>
+        <p:nvSpPr>
+          <p:cNvPr id="8" name="번호 1"/>
+          <p:cNvSpPr/>
+          <p:nvPr/>
+        </p:nvSpPr>
+        <p:spPr>
+          <a:xfrm>
+            <a:off x="822959" y="1965960"/>
+            <a:ext cx="457200" cy="457200"/>
+          </a:xfrm>
+          <a:prstGeom prst="ellipse">
+            <a:avLst/>
+          </a:prstGeom>
+          <a:noFill/>
+          <a:ln w="19050">
+            <a:solidFill>
+              <a:srgbClr val="98E1B1"/>
+            </a:solidFill>
           </a:ln>
         </p:spPr>
         <p:txBody>
@@ -4793,7 +5088,7 @@
             <a:r>
               <a:rPr sz="1600" b="1" i="0">
                 <a:solidFill>
-                  <a:srgbClr val="FFFFFF"/>
+                  <a:srgbClr val="274932"/>
                 </a:solidFill>
               </a:rPr>
               <a:t>1</a:t>
@@ -4803,13 +5098,13 @@
       </p:sp>
       <p:sp>
         <p:nvSpPr>
-          <p:cNvPr id="7" name="TextBox 6"/>
+          <p:cNvPr id="9" name="TextBox 8"/>
           <p:cNvSpPr txBox="1"/>
           <p:nvPr/>
         </p:nvSpPr>
         <p:spPr>
           <a:xfrm>
-            <a:off x="777240" y="2377440"/>
+            <a:off x="777240" y="2560320"/>
             <a:ext cx="2282113" cy="640080"/>
           </a:xfrm>
           <a:prstGeom prst="rect">
@@ -4831,7 +5126,7 @@
             <a:r>
               <a:rPr sz="1800" b="1" i="0">
                 <a:solidFill>
-                  <a:srgbClr val="183A23"/>
+                  <a:srgbClr val="274932"/>
                 </a:solidFill>
               </a:rPr>
               <a:t>첫 여행</a:t>
@@ -4841,14 +5136,14 @@
       </p:sp>
       <p:sp>
         <p:nvSpPr>
-          <p:cNvPr id="8" name="TextBox 7"/>
+          <p:cNvPr id="10" name="TextBox 9"/>
           <p:cNvSpPr txBox="1"/>
           <p:nvPr/>
         </p:nvSpPr>
         <p:spPr>
           <a:xfrm>
-            <a:off x="777240" y="3063240"/>
-            <a:ext cx="2282113" cy="3200400"/>
+            <a:off x="777240" y="3246120"/>
+            <a:ext cx="2282113" cy="2788920"/>
           </a:xfrm>
           <a:prstGeom prst="rect">
             <a:avLst/>
@@ -4869,7 +5164,7 @@
             <a:r>
               <a:rPr sz="1500" b="0" i="0">
                 <a:solidFill>
-                  <a:srgbClr val="2B2B2B"/>
+                  <a:srgbClr val="26231F"/>
                 </a:solidFill>
               </a:rPr>
               <a:t>어디였나요?</a:t>
@@ -4879,56 +5174,54 @@
       </p:sp>
       <p:sp>
         <p:nvSpPr>
-          <p:cNvPr id="9" name="카드 2"/>
+          <p:cNvPr id="11" name="카드 2"/>
           <p:cNvSpPr/>
           <p:nvPr/>
         </p:nvSpPr>
         <p:spPr>
           <a:xfrm>
-            <a:off x="3425113" y="1600200"/>
-            <a:ext cx="2556433" cy="4800600"/>
+            <a:off x="3425113" y="1783080"/>
+            <a:ext cx="2556433" cy="4389120"/>
           </a:xfrm>
           <a:prstGeom prst="roundRect">
             <a:avLst>
-              <a:gd name="adj" fmla="val 8000"/>
+              <a:gd name="adj" fmla="val 7000"/>
             </a:avLst>
           </a:prstGeom>
           <a:solidFill>
-            <a:srgbClr val="F1F9F3"/>
-          </a:solidFill>
-          <a:ln w="15875">
-            <a:solidFill>
-              <a:srgbClr val="D2EFDC"/>
-            </a:solidFill>
-          </a:ln>
-        </p:spPr>
-        <p:txBody>
-          <a:bodyPr rtlCol="0" anchor="ctr"/>
-          <a:lstStyle/>
-          <a:p>
-            <a:pPr algn="ctr"/>
-          </a:p>
-        </p:txBody>
-      </p:sp>
-      <p:sp>
-        <p:nvSpPr>
-          <p:cNvPr id="10" name="번호 2"/>
-          <p:cNvSpPr/>
-          <p:nvPr/>
-        </p:nvSpPr>
-        <p:spPr>
-          <a:xfrm>
-            <a:off x="3607993" y="1783080"/>
-            <a:ext cx="457200" cy="457200"/>
-          </a:xfrm>
-          <a:prstGeom prst="ellipse">
-            <a:avLst/>
-          </a:prstGeom>
-          <a:solidFill>
-            <a:srgbClr val="29653D"/>
+            <a:srgbClr val="ECFBF1"/>
           </a:solidFill>
           <a:ln>
             <a:noFill/>
+          </a:ln>
+        </p:spPr>
+        <p:txBody>
+          <a:bodyPr rtlCol="0" anchor="ctr"/>
+          <a:lstStyle/>
+          <a:p>
+            <a:pPr algn="ctr"/>
+          </a:p>
+        </p:txBody>
+      </p:sp>
+      <p:sp>
+        <p:nvSpPr>
+          <p:cNvPr id="12" name="번호 2"/>
+          <p:cNvSpPr/>
+          <p:nvPr/>
+        </p:nvSpPr>
+        <p:spPr>
+          <a:xfrm>
+            <a:off x="3607993" y="1965960"/>
+            <a:ext cx="457200" cy="457200"/>
+          </a:xfrm>
+          <a:prstGeom prst="ellipse">
+            <a:avLst/>
+          </a:prstGeom>
+          <a:noFill/>
+          <a:ln w="19050">
+            <a:solidFill>
+              <a:srgbClr val="98E1B1"/>
+            </a:solidFill>
           </a:ln>
         </p:spPr>
         <p:txBody>
@@ -4945,7 +5238,7 @@
             <a:r>
               <a:rPr sz="1600" b="1" i="0">
                 <a:solidFill>
-                  <a:srgbClr val="FFFFFF"/>
+                  <a:srgbClr val="274932"/>
                 </a:solidFill>
               </a:rPr>
               <a:t>2</a:t>
@@ -4955,13 +5248,13 @@
       </p:sp>
       <p:sp>
         <p:nvSpPr>
-          <p:cNvPr id="11" name="TextBox 10"/>
+          <p:cNvPr id="13" name="TextBox 12"/>
           <p:cNvSpPr txBox="1"/>
           <p:nvPr/>
         </p:nvSpPr>
         <p:spPr>
           <a:xfrm>
-            <a:off x="3562273" y="2377440"/>
+            <a:off x="3562273" y="2560320"/>
             <a:ext cx="2282113" cy="640080"/>
           </a:xfrm>
           <a:prstGeom prst="rect">
@@ -4983,7 +5276,7 @@
             <a:r>
               <a:rPr sz="1800" b="1" i="0">
                 <a:solidFill>
-                  <a:srgbClr val="183A23"/>
+                  <a:srgbClr val="274932"/>
                 </a:solidFill>
               </a:rPr>
               <a:t>첫 선물</a:t>
@@ -4993,14 +5286,14 @@
       </p:sp>
       <p:sp>
         <p:nvSpPr>
-          <p:cNvPr id="12" name="TextBox 11"/>
+          <p:cNvPr id="14" name="TextBox 13"/>
           <p:cNvSpPr txBox="1"/>
           <p:nvPr/>
         </p:nvSpPr>
         <p:spPr>
           <a:xfrm>
-            <a:off x="3562273" y="3063240"/>
-            <a:ext cx="2282113" cy="3200400"/>
+            <a:off x="3562273" y="3246120"/>
+            <a:ext cx="2282113" cy="2788920"/>
           </a:xfrm>
           <a:prstGeom prst="rect">
             <a:avLst/>
@@ -5021,7 +5314,7 @@
             <a:r>
               <a:rPr sz="1500" b="0" i="0">
                 <a:solidFill>
-                  <a:srgbClr val="2B2B2B"/>
+                  <a:srgbClr val="26231F"/>
                 </a:solidFill>
               </a:rPr>
               <a:t>무엇이었나요?</a:t>
@@ -5031,56 +5324,54 @@
       </p:sp>
       <p:sp>
         <p:nvSpPr>
-          <p:cNvPr id="13" name="카드 3"/>
+          <p:cNvPr id="15" name="카드 3"/>
           <p:cNvSpPr/>
           <p:nvPr/>
         </p:nvSpPr>
         <p:spPr>
           <a:xfrm>
-            <a:off x="6210147" y="1600200"/>
-            <a:ext cx="2556433" cy="4800600"/>
+            <a:off x="6210147" y="1783080"/>
+            <a:ext cx="2556433" cy="4389120"/>
           </a:xfrm>
           <a:prstGeom prst="roundRect">
             <a:avLst>
-              <a:gd name="adj" fmla="val 8000"/>
+              <a:gd name="adj" fmla="val 7000"/>
             </a:avLst>
           </a:prstGeom>
           <a:solidFill>
-            <a:srgbClr val="F1F9F3"/>
-          </a:solidFill>
-          <a:ln w="15875">
-            <a:solidFill>
-              <a:srgbClr val="D2EFDC"/>
-            </a:solidFill>
-          </a:ln>
-        </p:spPr>
-        <p:txBody>
-          <a:bodyPr rtlCol="0" anchor="ctr"/>
-          <a:lstStyle/>
-          <a:p>
-            <a:pPr algn="ctr"/>
-          </a:p>
-        </p:txBody>
-      </p:sp>
-      <p:sp>
-        <p:nvSpPr>
-          <p:cNvPr id="14" name="번호 3"/>
-          <p:cNvSpPr/>
-          <p:nvPr/>
-        </p:nvSpPr>
-        <p:spPr>
-          <a:xfrm>
-            <a:off x="6393027" y="1783080"/>
-            <a:ext cx="457200" cy="457200"/>
-          </a:xfrm>
-          <a:prstGeom prst="ellipse">
-            <a:avLst/>
-          </a:prstGeom>
-          <a:solidFill>
-            <a:srgbClr val="29653D"/>
+            <a:srgbClr val="ECFBF1"/>
           </a:solidFill>
           <a:ln>
             <a:noFill/>
+          </a:ln>
+        </p:spPr>
+        <p:txBody>
+          <a:bodyPr rtlCol="0" anchor="ctr"/>
+          <a:lstStyle/>
+          <a:p>
+            <a:pPr algn="ctr"/>
+          </a:p>
+        </p:txBody>
+      </p:sp>
+      <p:sp>
+        <p:nvSpPr>
+          <p:cNvPr id="16" name="번호 3"/>
+          <p:cNvSpPr/>
+          <p:nvPr/>
+        </p:nvSpPr>
+        <p:spPr>
+          <a:xfrm>
+            <a:off x="6393027" y="1965960"/>
+            <a:ext cx="457200" cy="457200"/>
+          </a:xfrm>
+          <a:prstGeom prst="ellipse">
+            <a:avLst/>
+          </a:prstGeom>
+          <a:noFill/>
+          <a:ln w="19050">
+            <a:solidFill>
+              <a:srgbClr val="98E1B1"/>
+            </a:solidFill>
           </a:ln>
         </p:spPr>
         <p:txBody>
@@ -5097,7 +5388,7 @@
             <a:r>
               <a:rPr sz="1600" b="1" i="0">
                 <a:solidFill>
-                  <a:srgbClr val="FFFFFF"/>
+                  <a:srgbClr val="274932"/>
                 </a:solidFill>
               </a:rPr>
               <a:t>3</a:t>
@@ -5107,13 +5398,13 @@
       </p:sp>
       <p:sp>
         <p:nvSpPr>
-          <p:cNvPr id="15" name="TextBox 14"/>
+          <p:cNvPr id="17" name="TextBox 16"/>
           <p:cNvSpPr txBox="1"/>
           <p:nvPr/>
         </p:nvSpPr>
         <p:spPr>
           <a:xfrm>
-            <a:off x="6347307" y="2377440"/>
+            <a:off x="6347307" y="2560320"/>
             <a:ext cx="2282113" cy="640080"/>
           </a:xfrm>
           <a:prstGeom prst="rect">
@@ -5135,7 +5426,7 @@
             <a:r>
               <a:rPr sz="1800" b="1" i="0">
                 <a:solidFill>
-                  <a:srgbClr val="183A23"/>
+                  <a:srgbClr val="274932"/>
                 </a:solidFill>
               </a:rPr>
               <a:t>첫 다툼</a:t>
@@ -5145,14 +5436,14 @@
       </p:sp>
       <p:sp>
         <p:nvSpPr>
-          <p:cNvPr id="16" name="TextBox 15"/>
+          <p:cNvPr id="18" name="TextBox 17"/>
           <p:cNvSpPr txBox="1"/>
           <p:nvPr/>
         </p:nvSpPr>
         <p:spPr>
           <a:xfrm>
-            <a:off x="6347307" y="3063240"/>
-            <a:ext cx="2282113" cy="3200400"/>
+            <a:off x="6347307" y="3246120"/>
+            <a:ext cx="2282113" cy="2788920"/>
           </a:xfrm>
           <a:prstGeom prst="rect">
             <a:avLst/>
@@ -5173,7 +5464,7 @@
             <a:r>
               <a:rPr sz="1500" b="0" i="0">
                 <a:solidFill>
-                  <a:srgbClr val="2B2B2B"/>
+                  <a:srgbClr val="26231F"/>
                 </a:solidFill>
               </a:rPr>
               <a:t>어떻게 풀었나요?</a:t>
@@ -5183,56 +5474,54 @@
       </p:sp>
       <p:sp>
         <p:nvSpPr>
-          <p:cNvPr id="17" name="카드 4"/>
+          <p:cNvPr id="19" name="카드 4"/>
           <p:cNvSpPr/>
           <p:nvPr/>
         </p:nvSpPr>
         <p:spPr>
           <a:xfrm>
-            <a:off x="8995181" y="1600200"/>
-            <a:ext cx="2556433" cy="4800600"/>
+            <a:off x="8995181" y="1783080"/>
+            <a:ext cx="2556433" cy="4389120"/>
           </a:xfrm>
           <a:prstGeom prst="roundRect">
             <a:avLst>
-              <a:gd name="adj" fmla="val 8000"/>
+              <a:gd name="adj" fmla="val 7000"/>
             </a:avLst>
           </a:prstGeom>
           <a:solidFill>
-            <a:srgbClr val="F1F9F3"/>
-          </a:solidFill>
-          <a:ln w="15875">
-            <a:solidFill>
-              <a:srgbClr val="D2EFDC"/>
-            </a:solidFill>
-          </a:ln>
-        </p:spPr>
-        <p:txBody>
-          <a:bodyPr rtlCol="0" anchor="ctr"/>
-          <a:lstStyle/>
-          <a:p>
-            <a:pPr algn="ctr"/>
-          </a:p>
-        </p:txBody>
-      </p:sp>
-      <p:sp>
-        <p:nvSpPr>
-          <p:cNvPr id="18" name="번호 4"/>
-          <p:cNvSpPr/>
-          <p:nvPr/>
-        </p:nvSpPr>
-        <p:spPr>
-          <a:xfrm>
-            <a:off x="9178061" y="1783080"/>
-            <a:ext cx="457200" cy="457200"/>
-          </a:xfrm>
-          <a:prstGeom prst="ellipse">
-            <a:avLst/>
-          </a:prstGeom>
-          <a:solidFill>
-            <a:srgbClr val="29653D"/>
+            <a:srgbClr val="ECFBF1"/>
           </a:solidFill>
           <a:ln>
             <a:noFill/>
+          </a:ln>
+        </p:spPr>
+        <p:txBody>
+          <a:bodyPr rtlCol="0" anchor="ctr"/>
+          <a:lstStyle/>
+          <a:p>
+            <a:pPr algn="ctr"/>
+          </a:p>
+        </p:txBody>
+      </p:sp>
+      <p:sp>
+        <p:nvSpPr>
+          <p:cNvPr id="20" name="번호 4"/>
+          <p:cNvSpPr/>
+          <p:nvPr/>
+        </p:nvSpPr>
+        <p:spPr>
+          <a:xfrm>
+            <a:off x="9178061" y="1965960"/>
+            <a:ext cx="457200" cy="457200"/>
+          </a:xfrm>
+          <a:prstGeom prst="ellipse">
+            <a:avLst/>
+          </a:prstGeom>
+          <a:noFill/>
+          <a:ln w="19050">
+            <a:solidFill>
+              <a:srgbClr val="98E1B1"/>
+            </a:solidFill>
           </a:ln>
         </p:spPr>
         <p:txBody>
@@ -5249,7 +5538,7 @@
             <a:r>
               <a:rPr sz="1600" b="1" i="0">
                 <a:solidFill>
-                  <a:srgbClr val="FFFFFF"/>
+                  <a:srgbClr val="274932"/>
                 </a:solidFill>
               </a:rPr>
               <a:t>4</a:t>
@@ -5259,13 +5548,13 @@
       </p:sp>
       <p:sp>
         <p:nvSpPr>
-          <p:cNvPr id="19" name="TextBox 18"/>
+          <p:cNvPr id="21" name="TextBox 20"/>
           <p:cNvSpPr txBox="1"/>
           <p:nvPr/>
         </p:nvSpPr>
         <p:spPr>
           <a:xfrm>
-            <a:off x="9132341" y="2377440"/>
+            <a:off x="9132341" y="2560320"/>
             <a:ext cx="2282113" cy="640080"/>
           </a:xfrm>
           <a:prstGeom prst="rect">
@@ -5287,7 +5576,7 @@
             <a:r>
               <a:rPr sz="1800" b="1" i="0">
                 <a:solidFill>
-                  <a:srgbClr val="183A23"/>
+                  <a:srgbClr val="274932"/>
                 </a:solidFill>
               </a:rPr>
               <a:t>첫 약속</a:t>
@@ -5297,14 +5586,14 @@
       </p:sp>
       <p:sp>
         <p:nvSpPr>
-          <p:cNvPr id="20" name="TextBox 19"/>
+          <p:cNvPr id="22" name="TextBox 21"/>
           <p:cNvSpPr txBox="1"/>
           <p:nvPr/>
         </p:nvSpPr>
         <p:spPr>
           <a:xfrm>
-            <a:off x="9132341" y="3063240"/>
-            <a:ext cx="2282113" cy="3200400"/>
+            <a:off x="9132341" y="3246120"/>
+            <a:ext cx="2282113" cy="2788920"/>
           </a:xfrm>
           <a:prstGeom prst="rect">
             <a:avLst/>
@@ -5325,7 +5614,7 @@
             <a:r>
               <a:rPr sz="1500" b="0" i="0">
                 <a:solidFill>
-                  <a:srgbClr val="2B2B2B"/>
+                  <a:srgbClr val="26231F"/>
                 </a:solidFill>
               </a:rPr>
               <a:t>무엇이었나요?</a:t>
@@ -5367,14 +5656,14 @@
         </p:nvSpPr>
         <p:spPr>
           <a:xfrm>
-            <a:off x="9905695" y="-1463040"/>
-            <a:ext cx="3840480" cy="3840480"/>
-          </a:xfrm>
-          <a:prstGeom prst="ellipse">
+            <a:off x="0" y="6565392"/>
+            <a:ext cx="12191695" cy="292608"/>
+          </a:xfrm>
+          <a:prstGeom prst="rect">
             <a:avLst/>
           </a:prstGeom>
           <a:solidFill>
-            <a:srgbClr val="D2EFDC"/>
+            <a:srgbClr val="ADEBC2"/>
           </a:solidFill>
           <a:ln>
             <a:noFill/>
@@ -5396,14 +5685,16 @@
         </p:nvSpPr>
         <p:spPr>
           <a:xfrm>
-            <a:off x="11094415" y="274320"/>
-            <a:ext cx="411480" cy="411480"/>
-          </a:xfrm>
-          <a:prstGeom prst="ellipse">
-            <a:avLst/>
+            <a:off x="640080" y="566928"/>
+            <a:ext cx="64008" cy="868680"/>
+          </a:xfrm>
+          <a:prstGeom prst="roundRect">
+            <a:avLst>
+              <a:gd name="adj" fmla="val 50000"/>
+            </a:avLst>
           </a:prstGeom>
           <a:solidFill>
-            <a:srgbClr val="29653D"/>
+            <a:srgbClr val="98E1B1"/>
           </a:solidFill>
           <a:ln>
             <a:noFill/>
@@ -5419,6 +5710,73 @@
       </p:sp>
       <p:sp>
         <p:nvSpPr>
+          <p:cNvPr id="5" name="상단 라벨"/>
+          <p:cNvSpPr txBox="1"/>
+          <p:nvPr/>
+        </p:nvSpPr>
+        <p:spPr>
+          <a:xfrm>
+            <a:off x="868680" y="274320"/>
+            <a:ext cx="5486400" cy="274320"/>
+          </a:xfrm>
+          <a:prstGeom prst="rect">
+            <a:avLst/>
+          </a:prstGeom>
+          <a:noFill/>
+        </p:spPr>
+        <p:txBody>
+          <a:bodyPr wrap="square" lIns="54864" rIns="54864" tIns="27432" bIns="27432" anchor="ctr">
+            <a:noAutofit/>
+          </a:bodyPr>
+          <a:lstStyle/>
+          <a:p>
+            <a:pPr algn="l">
+              <a:lnSpc>
+                <a:spcPct val="115000"/>
+              </a:lnSpc>
+            </a:pPr>
+            <a:r>
+              <a:rPr sz="900" b="1" i="0" spc="250">
+                <a:solidFill>
+                  <a:srgbClr val="8E8780"/>
+                </a:solidFill>
+              </a:rPr>
+              <a:t>WEDDING</a:t>
+            </a:r>
+          </a:p>
+        </p:txBody>
+      </p:sp>
+      <p:sp>
+        <p:nvSpPr>
+          <p:cNvPr id="6" name="포인트"/>
+          <p:cNvSpPr/>
+          <p:nvPr/>
+        </p:nvSpPr>
+        <p:spPr>
+          <a:xfrm>
+            <a:off x="11167567" y="667512"/>
+            <a:ext cx="310896" cy="310896"/>
+          </a:xfrm>
+          <a:prstGeom prst="heart">
+            <a:avLst/>
+          </a:prstGeom>
+          <a:solidFill>
+            <a:srgbClr val="ADEBC2"/>
+          </a:solidFill>
+          <a:ln>
+            <a:noFill/>
+          </a:ln>
+        </p:spPr>
+        <p:txBody>
+          <a:bodyPr rtlCol="0" anchor="ctr"/>
+          <a:lstStyle/>
+          <a:p>
+            <a:pPr algn="ctr"/>
+          </a:p>
+        </p:txBody>
+      </p:sp>
+      <p:sp>
+        <p:nvSpPr>
           <p:cNvPr id="2" name="Title 1"/>
           <p:cNvSpPr>
             <a:spLocks noGrp="1"/>
@@ -5429,8 +5787,8 @@
         </p:nvSpPr>
         <p:spPr>
           <a:xfrm>
-            <a:off x="640080" y="457200"/>
-            <a:ext cx="9722815" cy="868680"/>
+            <a:off x="868680" y="566928"/>
+            <a:ext cx="9448495" cy="868680"/>
           </a:xfrm>
         </p:spPr>
         <p:txBody>
@@ -5447,7 +5805,7 @@
             <a:r>
               <a:rPr sz="3000" b="1" i="0">
                 <a:solidFill>
-                  <a:srgbClr val="183A23"/>
+                  <a:srgbClr val="26231F"/>
                 </a:solidFill>
               </a:rPr>
               <a:t>웨딩 사진</a:t>
@@ -5457,14 +5815,14 @@
       </p:sp>
       <p:sp>
         <p:nvSpPr>
-          <p:cNvPr id="5" name="사진 자리"/>
+          <p:cNvPr id="7" name="사진 자리"/>
           <p:cNvSpPr/>
           <p:nvPr/>
         </p:nvSpPr>
         <p:spPr>
           <a:xfrm>
-            <a:off x="640080" y="1600200"/>
-            <a:ext cx="3515258" cy="2308860"/>
+            <a:off x="640080" y="1783080"/>
+            <a:ext cx="3515258" cy="2103120"/>
           </a:xfrm>
           <a:prstGeom prst="roundRect">
             <a:avLst>
@@ -5472,12 +5830,10 @@
             </a:avLst>
           </a:prstGeom>
           <a:solidFill>
-            <a:srgbClr val="D2EFDC"/>
+            <a:srgbClr val="D5F6E0"/>
           </a:solidFill>
           <a:ln w="19050">
-            <a:solidFill>
-              <a:srgbClr val="29653D"/>
-            </a:solidFill>
+            <a:noFill/>
             <a:prstDash val="dash"/>
           </a:ln>
         </p:spPr>
@@ -5495,7 +5851,7 @@
             <a:r>
               <a:rPr sz="1200" b="0" i="0">
                 <a:solidFill>
-                  <a:srgbClr val="183A23"/>
+                  <a:srgbClr val="8E8780"/>
                 </a:solidFill>
               </a:rPr>
               <a:t>사진 1</a:t>
@@ -5505,14 +5861,14 @@
       </p:sp>
       <p:sp>
         <p:nvSpPr>
-          <p:cNvPr id="6" name="사진 자리"/>
+          <p:cNvPr id="8" name="사진 자리"/>
           <p:cNvSpPr/>
           <p:nvPr/>
         </p:nvSpPr>
         <p:spPr>
           <a:xfrm>
-            <a:off x="4338218" y="1600200"/>
-            <a:ext cx="3515258" cy="2308860"/>
+            <a:off x="4338218" y="1783080"/>
+            <a:ext cx="3515258" cy="2103120"/>
           </a:xfrm>
           <a:prstGeom prst="roundRect">
             <a:avLst>
@@ -5520,12 +5876,10 @@
             </a:avLst>
           </a:prstGeom>
           <a:solidFill>
-            <a:srgbClr val="D2EFDC"/>
+            <a:srgbClr val="D5F6E0"/>
           </a:solidFill>
           <a:ln w="19050">
-            <a:solidFill>
-              <a:srgbClr val="29653D"/>
-            </a:solidFill>
+            <a:noFill/>
             <a:prstDash val="dash"/>
           </a:ln>
         </p:spPr>
@@ -5543,7 +5897,7 @@
             <a:r>
               <a:rPr sz="1200" b="0" i="0">
                 <a:solidFill>
-                  <a:srgbClr val="183A23"/>
+                  <a:srgbClr val="8E8780"/>
                 </a:solidFill>
               </a:rPr>
               <a:t>사진 2</a:t>
@@ -5553,14 +5907,14 @@
       </p:sp>
       <p:sp>
         <p:nvSpPr>
-          <p:cNvPr id="7" name="사진 자리"/>
+          <p:cNvPr id="9" name="사진 자리"/>
           <p:cNvSpPr/>
           <p:nvPr/>
         </p:nvSpPr>
         <p:spPr>
           <a:xfrm>
-            <a:off x="8036356" y="1600200"/>
-            <a:ext cx="3515258" cy="2308860"/>
+            <a:off x="8036356" y="1783080"/>
+            <a:ext cx="3515258" cy="2103120"/>
           </a:xfrm>
           <a:prstGeom prst="roundRect">
             <a:avLst>
@@ -5568,12 +5922,10 @@
             </a:avLst>
           </a:prstGeom>
           <a:solidFill>
-            <a:srgbClr val="D2EFDC"/>
+            <a:srgbClr val="D5F6E0"/>
           </a:solidFill>
           <a:ln w="19050">
-            <a:solidFill>
-              <a:srgbClr val="29653D"/>
-            </a:solidFill>
+            <a:noFill/>
             <a:prstDash val="dash"/>
           </a:ln>
         </p:spPr>
@@ -5591,7 +5943,7 @@
             <a:r>
               <a:rPr sz="1200" b="0" i="0">
                 <a:solidFill>
-                  <a:srgbClr val="183A23"/>
+                  <a:srgbClr val="8E8780"/>
                 </a:solidFill>
               </a:rPr>
               <a:t>사진 3</a:t>
@@ -5601,14 +5953,14 @@
       </p:sp>
       <p:sp>
         <p:nvSpPr>
-          <p:cNvPr id="8" name="사진 자리"/>
+          <p:cNvPr id="10" name="사진 자리"/>
           <p:cNvSpPr/>
           <p:nvPr/>
         </p:nvSpPr>
         <p:spPr>
           <a:xfrm>
-            <a:off x="640080" y="4091939"/>
-            <a:ext cx="3515258" cy="2308860"/>
+            <a:off x="640080" y="4069080"/>
+            <a:ext cx="3515258" cy="2103120"/>
           </a:xfrm>
           <a:prstGeom prst="roundRect">
             <a:avLst>
@@ -5616,12 +5968,10 @@
             </a:avLst>
           </a:prstGeom>
           <a:solidFill>
-            <a:srgbClr val="D2EFDC"/>
+            <a:srgbClr val="D5F6E0"/>
           </a:solidFill>
           <a:ln w="19050">
-            <a:solidFill>
-              <a:srgbClr val="29653D"/>
-            </a:solidFill>
+            <a:noFill/>
             <a:prstDash val="dash"/>
           </a:ln>
         </p:spPr>
@@ -5639,7 +5989,7 @@
             <a:r>
               <a:rPr sz="1200" b="0" i="0">
                 <a:solidFill>
-                  <a:srgbClr val="183A23"/>
+                  <a:srgbClr val="8E8780"/>
                 </a:solidFill>
               </a:rPr>
               <a:t>사진 4</a:t>
@@ -5649,14 +5999,14 @@
       </p:sp>
       <p:sp>
         <p:nvSpPr>
-          <p:cNvPr id="9" name="사진 자리"/>
+          <p:cNvPr id="11" name="사진 자리"/>
           <p:cNvSpPr/>
           <p:nvPr/>
         </p:nvSpPr>
         <p:spPr>
           <a:xfrm>
-            <a:off x="4338218" y="4091939"/>
-            <a:ext cx="3515258" cy="2308860"/>
+            <a:off x="4338218" y="4069080"/>
+            <a:ext cx="3515258" cy="2103120"/>
           </a:xfrm>
           <a:prstGeom prst="roundRect">
             <a:avLst>
@@ -5664,12 +6014,10 @@
             </a:avLst>
           </a:prstGeom>
           <a:solidFill>
-            <a:srgbClr val="D2EFDC"/>
+            <a:srgbClr val="D5F6E0"/>
           </a:solidFill>
           <a:ln w="19050">
-            <a:solidFill>
-              <a:srgbClr val="29653D"/>
-            </a:solidFill>
+            <a:noFill/>
             <a:prstDash val="dash"/>
           </a:ln>
         </p:spPr>
@@ -5687,7 +6035,7 @@
             <a:r>
               <a:rPr sz="1200" b="0" i="0">
                 <a:solidFill>
-                  <a:srgbClr val="183A23"/>
+                  <a:srgbClr val="8E8780"/>
                 </a:solidFill>
               </a:rPr>
               <a:t>사진 5</a:t>
@@ -5697,14 +6045,14 @@
       </p:sp>
       <p:sp>
         <p:nvSpPr>
-          <p:cNvPr id="10" name="사진 자리"/>
+          <p:cNvPr id="12" name="사진 자리"/>
           <p:cNvSpPr/>
           <p:nvPr/>
         </p:nvSpPr>
         <p:spPr>
           <a:xfrm>
-            <a:off x="8036356" y="4091939"/>
-            <a:ext cx="3515258" cy="2308860"/>
+            <a:off x="8036356" y="4069080"/>
+            <a:ext cx="3515258" cy="2103120"/>
           </a:xfrm>
           <a:prstGeom prst="roundRect">
             <a:avLst>
@@ -5712,12 +6060,10 @@
             </a:avLst>
           </a:prstGeom>
           <a:solidFill>
-            <a:srgbClr val="D2EFDC"/>
+            <a:srgbClr val="D5F6E0"/>
           </a:solidFill>
           <a:ln w="19050">
-            <a:solidFill>
-              <a:srgbClr val="29653D"/>
-            </a:solidFill>
+            <a:noFill/>
             <a:prstDash val="dash"/>
           </a:ln>
         </p:spPr>
@@ -5735,7 +6081,7 @@
             <a:r>
               <a:rPr sz="1200" b="0" i="0">
                 <a:solidFill>
-                  <a:srgbClr val="183A23"/>
+                  <a:srgbClr val="8E8780"/>
                 </a:solidFill>
               </a:rPr>
               <a:t>사진 6</a:t>
@@ -5754,6 +6100,14 @@
 <file path=ppt/slides/slide6.xml><?xml version="1.0" encoding="utf-8"?>
 <p:sld xmlns:a="http://schemas.openxmlformats.org/drawingml/2006/main" xmlns:p="http://schemas.openxmlformats.org/presentationml/2006/main" xmlns:r="http://schemas.openxmlformats.org/officeDocument/2006/relationships">
   <p:cSld>
+    <p:bg>
+      <p:bgPr>
+        <a:solidFill>
+          <a:srgbClr val="D5F6E0"/>
+        </a:solidFill>
+        <a:effectLst/>
+      </p:bgPr>
+    </p:bg>
     <p:spTree>
       <p:nvGrpSpPr>
         <p:cNvPr id="1" name=""/>
@@ -5761,30 +6115,116 @@
         <p:nvPr/>
       </p:nvGrpSpPr>
       <p:grpSpPr/>
-      <p:pic>
-        <p:nvPicPr>
-          <p:cNvPr id="3" name="표지 그림" descr="wedding-47.jpg"/>
-          <p:cNvPicPr>
-            <a:picLocks noChangeAspect="1"/>
-          </p:cNvPicPr>
-          <p:nvPr/>
-        </p:nvPicPr>
-        <p:blipFill>
-          <a:blip r:embed="rId2"/>
-          <a:stretch>
-            <a:fillRect/>
-          </a:stretch>
-        </p:blipFill>
-        <p:spPr>
-          <a:xfrm>
-            <a:off x="0" y="0"/>
-            <a:ext cx="12191695" cy="6858000"/>
+      <p:sp>
+        <p:nvSpPr>
+          <p:cNvPr id="3" name="사진 자리"/>
+          <p:cNvSpPr/>
+          <p:nvPr/>
+        </p:nvSpPr>
+        <p:spPr>
+          <a:xfrm>
+            <a:off x="7802684" y="0"/>
+            <a:ext cx="4389010" cy="6858000"/>
           </a:xfrm>
           <a:prstGeom prst="rect">
             <a:avLst/>
           </a:prstGeom>
-        </p:spPr>
-      </p:pic>
+          <a:solidFill>
+            <a:srgbClr val="ADEBC2"/>
+          </a:solidFill>
+          <a:ln>
+            <a:noFill/>
+          </a:ln>
+        </p:spPr>
+        <p:txBody>
+          <a:bodyPr rtlCol="0" anchor="ctr" wrap="square" lIns="54864" rIns="54864" tIns="27432" bIns="27432">
+            <a:noAutofit/>
+          </a:bodyPr>
+          <a:lstStyle/>
+          <a:p>
+            <a:pPr algn="ctr">
+              <a:lnSpc>
+                <a:spcPct val="100000"/>
+              </a:lnSpc>
+            </a:pPr>
+            <a:r>
+              <a:rPr sz="1400" b="0" i="0">
+                <a:solidFill>
+                  <a:srgbClr val="274932"/>
+                </a:solidFill>
+              </a:rPr>
+              <a:t>사진을 넣어 주세요</a:t>
+            </a:r>
+          </a:p>
+        </p:txBody>
+      </p:sp>
+      <p:sp>
+        <p:nvSpPr>
+          <p:cNvPr id="4" name="장식"/>
+          <p:cNvSpPr/>
+          <p:nvPr/>
+        </p:nvSpPr>
+        <p:spPr>
+          <a:xfrm>
+            <a:off x="8168435" y="365760"/>
+            <a:ext cx="3657508" cy="6126480"/>
+          </a:xfrm>
+          <a:prstGeom prst="rect">
+            <a:avLst/>
+          </a:prstGeom>
+          <a:noFill/>
+          <a:ln w="9525">
+            <a:solidFill>
+              <a:srgbClr val="26231F"/>
+            </a:solidFill>
+          </a:ln>
+        </p:spPr>
+        <p:txBody>
+          <a:bodyPr rtlCol="0" anchor="ctr"/>
+          <a:lstStyle/>
+          <a:p>
+            <a:pPr algn="ctr"/>
+          </a:p>
+        </p:txBody>
+      </p:sp>
+      <p:sp>
+        <p:nvSpPr>
+          <p:cNvPr id="5" name="라벨"/>
+          <p:cNvSpPr txBox="1"/>
+          <p:nvPr/>
+        </p:nvSpPr>
+        <p:spPr>
+          <a:xfrm>
+            <a:off x="822960" y="2148840"/>
+            <a:ext cx="5608179" cy="274320"/>
+          </a:xfrm>
+          <a:prstGeom prst="rect">
+            <a:avLst/>
+          </a:prstGeom>
+          <a:noFill/>
+        </p:spPr>
+        <p:txBody>
+          <a:bodyPr wrap="square" lIns="54864" rIns="54864" tIns="27432" bIns="27432" anchor="t">
+            <a:noAutofit/>
+          </a:bodyPr>
+          <a:lstStyle/>
+          <a:p>
+            <a:pPr algn="l">
+              <a:lnSpc>
+                <a:spcPct val="115000"/>
+              </a:lnSpc>
+            </a:pPr>
+            <a:r>
+              <a:rPr sz="1000" b="1" i="0" spc="250">
+                <a:solidFill>
+                  <a:srgbClr val="26231F"/>
+                </a:solidFill>
+              </a:rPr>
+              <a:t>WEDDING</a:t>
+            </a:r>
+          </a:p>
+        </p:txBody>
+      </p:sp>
       <p:sp>
         <p:nvSpPr>
           <p:cNvPr id="2" name="Title 1"/>
@@ -5797,8 +6237,8 @@
         </p:nvSpPr>
         <p:spPr>
           <a:xfrm>
-            <a:off x="853418" y="2057400"/>
-            <a:ext cx="6095847" cy="1554480"/>
+            <a:off x="822960" y="2606040"/>
+            <a:ext cx="5608179" cy="1188720"/>
           </a:xfrm>
         </p:spPr>
         <p:txBody>
@@ -5815,7 +6255,7 @@
             <a:r>
               <a:rPr sz="3400" b="1" i="0">
                 <a:solidFill>
-                  <a:srgbClr val="183A23"/>
+                  <a:srgbClr val="26231F"/>
                 </a:solidFill>
               </a:rPr>
               <a:t>와 주셔서 고맙습니다</a:t>
@@ -5825,14 +6265,14 @@
       </p:sp>
       <p:sp>
         <p:nvSpPr>
-          <p:cNvPr id="4" name="한 줄 문구"/>
+          <p:cNvPr id="6" name="한 줄 문구"/>
           <p:cNvSpPr txBox="1"/>
           <p:nvPr/>
         </p:nvSpPr>
         <p:spPr>
           <a:xfrm>
-            <a:off x="853418" y="3749039"/>
-            <a:ext cx="6095847" cy="822960"/>
+            <a:off x="822960" y="3886200"/>
+            <a:ext cx="5608179" cy="822960"/>
           </a:xfrm>
           <a:prstGeom prst="rect">
             <a:avLst/>
@@ -5851,9 +6291,9 @@
               </a:lnSpc>
             </a:pPr>
             <a:r>
-              <a:rPr sz="1700" b="0" i="1">
-                <a:solidFill>
-                  <a:srgbClr val="183A23"/>
+              <a:rPr sz="1700" b="0" i="0">
+                <a:solidFill>
+                  <a:srgbClr val="26231F"/>
                 </a:solidFill>
               </a:rPr>
               <a:t>잘 살겠습니다</a:t>
@@ -5863,14 +6303,14 @@
       </p:sp>
       <p:sp>
         <p:nvSpPr>
-          <p:cNvPr id="5" name="안내 문구"/>
+          <p:cNvPr id="7" name="안내 문구"/>
           <p:cNvSpPr txBox="1"/>
           <p:nvPr/>
         </p:nvSpPr>
         <p:spPr>
           <a:xfrm>
-            <a:off x="853418" y="4617720"/>
-            <a:ext cx="6095847" cy="914400"/>
+            <a:off x="822960" y="4754880"/>
+            <a:ext cx="5608179" cy="914400"/>
           </a:xfrm>
           <a:prstGeom prst="rect">
             <a:avLst/>
@@ -5891,7 +6331,7 @@
             <a:r>
               <a:rPr sz="1400" b="0" i="0">
                 <a:solidFill>
-                  <a:srgbClr val="666666"/>
+                  <a:srgbClr val="26231F"/>
                 </a:solidFill>
               </a:rPr>
               <a:t>신랑 이름 ♥ 신부 이름</a:t>
@@ -5918,34 +6358,34 @@
         <a:sysClr val="window" lastClr="FFFFFF"/>
       </a:lt1>
       <a:dk2>
-        <a:srgbClr val="183A23"/>
+        <a:srgbClr val="274932"/>
       </a:dk2>
       <a:lt2>
-        <a:srgbClr val="F1F9F3"/>
+        <a:srgbClr val="ECFBF1"/>
       </a:lt2>
       <a:accent1>
-        <a:srgbClr val="29653D"/>
+        <a:srgbClr val="98E1B1"/>
       </a:accent1>
       <a:accent2>
-        <a:srgbClr val="833B91"/>
+        <a:srgbClr val="B8EAE0"/>
       </a:accent2>
       <a:accent3>
-        <a:srgbClr val="183A23"/>
+        <a:srgbClr val="274932"/>
       </a:accent3>
       <a:accent4>
-        <a:srgbClr val="D2EFDC"/>
+        <a:srgbClr val="D5F6E0"/>
       </a:accent4>
       <a:accent5>
-        <a:srgbClr val="565067"/>
+        <a:srgbClr val="A8E6C8"/>
       </a:accent5>
       <a:accent6>
-        <a:srgbClr val="74897B"/>
+        <a:srgbClr val="7D9284"/>
       </a:accent6>
       <a:hlink>
-        <a:srgbClr val="29653D"/>
+        <a:srgbClr val="98E1B1"/>
       </a:hlink>
       <a:folHlink>
-        <a:srgbClr val="183A23"/>
+        <a:srgbClr val="274932"/>
       </a:folHlink>
     </a:clrScheme>
     <a:fontScheme name="Office">
